--- a/slides/0_intro.pptx
+++ b/slides/0_intro.pptx
@@ -491,7 +491,7 @@
           <a:p>
             <a:fld id="{506E0FD1-891F-4B1E-916D-E9B585160BB8}" type="datetimeFigureOut">
               <a:rPr lang="en-GB" smtClean="0"/>
-              <a:t>29/01/2026</a:t>
+              <a:t>11/03/2026</a:t>
             </a:fld>
             <a:endParaRPr lang="en-GB"/>
           </a:p>
@@ -908,7 +908,7 @@
           <a:p>
             <a:fld id="{D68C3F22-27B2-44E3-9C5F-D08126455F6F}" type="datetime1">
               <a:rPr lang="en-GB" smtClean="0"/>
-              <a:t>29/01/2026</a:t>
+              <a:t>11/03/2026</a:t>
             </a:fld>
             <a:endParaRPr lang="en-GB"/>
           </a:p>
@@ -1108,7 +1108,7 @@
           <a:p>
             <a:fld id="{1CD03846-7BF6-4FB6-A921-FF3379ADBD4C}" type="datetime1">
               <a:rPr lang="en-GB" smtClean="0"/>
-              <a:t>29/01/2026</a:t>
+              <a:t>11/03/2026</a:t>
             </a:fld>
             <a:endParaRPr lang="en-GB"/>
           </a:p>
@@ -1318,7 +1318,7 @@
           <a:p>
             <a:fld id="{99E1B91A-3FD0-4144-9C84-63E9688ED2FE}" type="datetime1">
               <a:rPr lang="en-GB" smtClean="0"/>
-              <a:t>29/01/2026</a:t>
+              <a:t>11/03/2026</a:t>
             </a:fld>
             <a:endParaRPr lang="en-GB"/>
           </a:p>
@@ -1518,7 +1518,7 @@
           <a:p>
             <a:fld id="{5295ED7B-FEAD-4734-819F-93EF4B0EA908}" type="datetime1">
               <a:rPr lang="en-GB" smtClean="0"/>
-              <a:t>29/01/2026</a:t>
+              <a:t>11/03/2026</a:t>
             </a:fld>
             <a:endParaRPr lang="en-GB"/>
           </a:p>
@@ -1794,7 +1794,7 @@
           <a:p>
             <a:fld id="{D2D5D4B4-C926-4B45-8815-1ED8911179A2}" type="datetime1">
               <a:rPr lang="en-GB" smtClean="0"/>
-              <a:t>29/01/2026</a:t>
+              <a:t>11/03/2026</a:t>
             </a:fld>
             <a:endParaRPr lang="en-GB"/>
           </a:p>
@@ -2062,7 +2062,7 @@
           <a:p>
             <a:fld id="{B4C5210A-0E37-4935-93AF-69F21A5F712F}" type="datetime1">
               <a:rPr lang="en-GB" smtClean="0"/>
-              <a:t>29/01/2026</a:t>
+              <a:t>11/03/2026</a:t>
             </a:fld>
             <a:endParaRPr lang="en-GB"/>
           </a:p>
@@ -2477,7 +2477,7 @@
           <a:p>
             <a:fld id="{3D3A6B2F-436C-4691-80E8-9C890E000E9D}" type="datetime1">
               <a:rPr lang="en-GB" smtClean="0"/>
-              <a:t>29/01/2026</a:t>
+              <a:t>11/03/2026</a:t>
             </a:fld>
             <a:endParaRPr lang="en-GB"/>
           </a:p>
@@ -2619,7 +2619,7 @@
           <a:p>
             <a:fld id="{84385F4C-D74B-496F-8D21-97E3549C783B}" type="datetime1">
               <a:rPr lang="en-GB" smtClean="0"/>
-              <a:t>29/01/2026</a:t>
+              <a:t>11/03/2026</a:t>
             </a:fld>
             <a:endParaRPr lang="en-GB"/>
           </a:p>
@@ -2732,7 +2732,7 @@
           <a:p>
             <a:fld id="{0CBDCB32-C241-4703-A832-4EB47BD54E83}" type="datetime1">
               <a:rPr lang="en-GB" smtClean="0"/>
-              <a:t>29/01/2026</a:t>
+              <a:t>11/03/2026</a:t>
             </a:fld>
             <a:endParaRPr lang="en-GB"/>
           </a:p>
@@ -3045,7 +3045,7 @@
           <a:p>
             <a:fld id="{85C150FF-BE95-4D25-A16A-E368A81CBF24}" type="datetime1">
               <a:rPr lang="en-GB" smtClean="0"/>
-              <a:t>29/01/2026</a:t>
+              <a:t>11/03/2026</a:t>
             </a:fld>
             <a:endParaRPr lang="en-GB"/>
           </a:p>
@@ -3334,7 +3334,7 @@
           <a:p>
             <a:fld id="{F3C5DB4B-B349-43C9-A424-BADA723AD9F1}" type="datetime1">
               <a:rPr lang="en-GB" smtClean="0"/>
-              <a:t>29/01/2026</a:t>
+              <a:t>11/03/2026</a:t>
             </a:fld>
             <a:endParaRPr lang="en-GB"/>
           </a:p>
@@ -3577,7 +3577,7 @@
           <a:p>
             <a:fld id="{12632426-0A0C-405F-A3D0-2D11AA44702A}" type="datetime1">
               <a:rPr lang="en-GB" smtClean="0"/>
-              <a:t>29/01/2026</a:t>
+              <a:t>11/03/2026</a:t>
             </a:fld>
             <a:endParaRPr lang="en-GB"/>
           </a:p>
@@ -4210,7 +4210,42 @@
               <a:rPr lang="de-DE" dirty="0" err="1"/>
               <a:t>controller</a:t>
             </a:r>
-            <a:endParaRPr lang="de-DE" dirty="0"/>
+            <a:r>
+              <a:rPr lang="de-DE" dirty="0"/>
+              <a:t> (</a:t>
+            </a:r>
+            <a:r>
+              <a:rPr lang="de-DE" dirty="0" err="1"/>
+              <a:t>regarding</a:t>
+            </a:r>
+            <a:r>
+              <a:rPr lang="de-DE" dirty="0"/>
+              <a:t> </a:t>
+            </a:r>
+            <a:r>
+              <a:rPr lang="de-DE" dirty="0" err="1"/>
+              <a:t>the</a:t>
+            </a:r>
+            <a:r>
+              <a:rPr lang="de-DE" dirty="0"/>
+              <a:t> </a:t>
+            </a:r>
+            <a:r>
+              <a:rPr lang="de-DE" dirty="0" err="1"/>
+              <a:t>process</a:t>
+            </a:r>
+            <a:r>
+              <a:rPr lang="de-DE" dirty="0"/>
+              <a:t> </a:t>
+            </a:r>
+            <a:r>
+              <a:rPr lang="de-DE" dirty="0" err="1"/>
+              <a:t>behavior</a:t>
+            </a:r>
+            <a:r>
+              <a:rPr lang="de-DE" dirty="0"/>
+              <a:t>)</a:t>
+            </a:r>
           </a:p>
           <a:p>
             <a:pPr marL="0" indent="0">
@@ -7209,6 +7244,82 @@
           </a:p>
         </p:txBody>
       </p:sp>
+      <p:sp>
+        <p:nvSpPr>
+          <p:cNvPr id="2" name="Textfeld 1">
+            <a:extLst>
+              <a:ext uri="{FF2B5EF4-FFF2-40B4-BE49-F238E27FC236}">
+                <a16:creationId xmlns:a16="http://schemas.microsoft.com/office/drawing/2014/main" id="{DA62C64C-D9DF-BB1A-4590-0128D63505A4}"/>
+              </a:ext>
+            </a:extLst>
+          </p:cNvPr>
+          <p:cNvSpPr txBox="1"/>
+          <p:nvPr/>
+        </p:nvSpPr>
+        <p:spPr>
+          <a:xfrm>
+            <a:off x="1171853" y="2476870"/>
+            <a:ext cx="1127463" cy="646331"/>
+          </a:xfrm>
+          <a:prstGeom prst="rect">
+            <a:avLst/>
+          </a:prstGeom>
+          <a:noFill/>
+        </p:spPr>
+        <p:txBody>
+          <a:bodyPr wrap="square" rtlCol="0">
+            <a:spAutoFit/>
+          </a:bodyPr>
+          <a:lstStyle/>
+          <a:p>
+            <a:r>
+              <a:rPr lang="de-DE" dirty="0"/>
+              <a:t>Control Deviation</a:t>
+            </a:r>
+          </a:p>
+        </p:txBody>
+      </p:sp>
+      <p:cxnSp>
+        <p:nvCxnSpPr>
+          <p:cNvPr id="5" name="Gerade Verbindung mit Pfeil 4">
+            <a:extLst>
+              <a:ext uri="{FF2B5EF4-FFF2-40B4-BE49-F238E27FC236}">
+                <a16:creationId xmlns:a16="http://schemas.microsoft.com/office/drawing/2014/main" id="{EB08342E-6370-C428-4AAE-027C8BD1D8E3}"/>
+              </a:ext>
+            </a:extLst>
+          </p:cNvPr>
+          <p:cNvCxnSpPr>
+            <a:stCxn id="2" idx="2"/>
+          </p:cNvCxnSpPr>
+          <p:nvPr/>
+        </p:nvCxnSpPr>
+        <p:spPr>
+          <a:xfrm>
+            <a:off x="1735585" y="3123201"/>
+            <a:ext cx="412811" cy="685319"/>
+          </a:xfrm>
+          <a:prstGeom prst="straightConnector1">
+            <a:avLst/>
+          </a:prstGeom>
+          <a:ln>
+            <a:tailEnd type="triangle"/>
+          </a:ln>
+        </p:spPr>
+        <p:style>
+          <a:lnRef idx="2">
+            <a:schemeClr val="accent1"/>
+          </a:lnRef>
+          <a:fillRef idx="0">
+            <a:schemeClr val="accent1"/>
+          </a:fillRef>
+          <a:effectRef idx="1">
+            <a:schemeClr val="accent1"/>
+          </a:effectRef>
+          <a:fontRef idx="minor">
+            <a:schemeClr val="tx1"/>
+          </a:fontRef>
+        </p:style>
+      </p:cxnSp>
     </p:spTree>
     <p:extLst>
       <p:ext uri="{BB962C8B-B14F-4D97-AF65-F5344CB8AC3E}">
